--- a/images/Front-design.pptx
+++ b/images/Front-design.pptx
@@ -5,8 +5,7 @@
     <p:sldMasterId id="2147483648" r:id="rId1"/>
   </p:sldMasterIdLst>
   <p:sldIdLst>
-    <p:sldId id="260" r:id="rId2"/>
-    <p:sldId id="262" r:id="rId3"/>
+    <p:sldId id="262" r:id="rId2"/>
   </p:sldIdLst>
   <p:sldSz cx="12192000" cy="6858000"/>
   <p:notesSz cx="6858000" cy="9144000"/>
@@ -244,7 +243,7 @@
           <a:p>
             <a:fld id="{35A37826-251B-4A88-B5F1-14358E59E079}" type="datetimeFigureOut">
               <a:rPr lang="zh-CN" altLang="en-US" smtClean="0"/>
-              <a:t>2026/5/19</a:t>
+              <a:t>2026/7/11</a:t>
             </a:fld>
             <a:endParaRPr lang="zh-CN" altLang="en-US"/>
           </a:p>
@@ -414,7 +413,7 @@
           <a:p>
             <a:fld id="{35A37826-251B-4A88-B5F1-14358E59E079}" type="datetimeFigureOut">
               <a:rPr lang="zh-CN" altLang="en-US" smtClean="0"/>
-              <a:t>2026/5/19</a:t>
+              <a:t>2026/7/11</a:t>
             </a:fld>
             <a:endParaRPr lang="zh-CN" altLang="en-US"/>
           </a:p>
@@ -594,7 +593,7 @@
           <a:p>
             <a:fld id="{35A37826-251B-4A88-B5F1-14358E59E079}" type="datetimeFigureOut">
               <a:rPr lang="zh-CN" altLang="en-US" smtClean="0"/>
-              <a:t>2026/5/19</a:t>
+              <a:t>2026/7/11</a:t>
             </a:fld>
             <a:endParaRPr lang="zh-CN" altLang="en-US"/>
           </a:p>
@@ -764,7 +763,7 @@
           <a:p>
             <a:fld id="{35A37826-251B-4A88-B5F1-14358E59E079}" type="datetimeFigureOut">
               <a:rPr lang="zh-CN" altLang="en-US" smtClean="0"/>
-              <a:t>2026/5/19</a:t>
+              <a:t>2026/7/11</a:t>
             </a:fld>
             <a:endParaRPr lang="zh-CN" altLang="en-US"/>
           </a:p>
@@ -1010,7 +1009,7 @@
           <a:p>
             <a:fld id="{35A37826-251B-4A88-B5F1-14358E59E079}" type="datetimeFigureOut">
               <a:rPr lang="zh-CN" altLang="en-US" smtClean="0"/>
-              <a:t>2026/5/19</a:t>
+              <a:t>2026/7/11</a:t>
             </a:fld>
             <a:endParaRPr lang="zh-CN" altLang="en-US"/>
           </a:p>
@@ -1242,7 +1241,7 @@
           <a:p>
             <a:fld id="{35A37826-251B-4A88-B5F1-14358E59E079}" type="datetimeFigureOut">
               <a:rPr lang="zh-CN" altLang="en-US" smtClean="0"/>
-              <a:t>2026/5/19</a:t>
+              <a:t>2026/7/11</a:t>
             </a:fld>
             <a:endParaRPr lang="zh-CN" altLang="en-US"/>
           </a:p>
@@ -1609,7 +1608,7 @@
           <a:p>
             <a:fld id="{35A37826-251B-4A88-B5F1-14358E59E079}" type="datetimeFigureOut">
               <a:rPr lang="zh-CN" altLang="en-US" smtClean="0"/>
-              <a:t>2026/5/19</a:t>
+              <a:t>2026/7/11</a:t>
             </a:fld>
             <a:endParaRPr lang="zh-CN" altLang="en-US"/>
           </a:p>
@@ -1727,7 +1726,7 @@
           <a:p>
             <a:fld id="{35A37826-251B-4A88-B5F1-14358E59E079}" type="datetimeFigureOut">
               <a:rPr lang="zh-CN" altLang="en-US" smtClean="0"/>
-              <a:t>2026/5/19</a:t>
+              <a:t>2026/7/11</a:t>
             </a:fld>
             <a:endParaRPr lang="zh-CN" altLang="en-US"/>
           </a:p>
@@ -1822,7 +1821,7 @@
           <a:p>
             <a:fld id="{35A37826-251B-4A88-B5F1-14358E59E079}" type="datetimeFigureOut">
               <a:rPr lang="zh-CN" altLang="en-US" smtClean="0"/>
-              <a:t>2026/5/19</a:t>
+              <a:t>2026/7/11</a:t>
             </a:fld>
             <a:endParaRPr lang="zh-CN" altLang="en-US"/>
           </a:p>
@@ -2099,7 +2098,7 @@
           <a:p>
             <a:fld id="{35A37826-251B-4A88-B5F1-14358E59E079}" type="datetimeFigureOut">
               <a:rPr lang="zh-CN" altLang="en-US" smtClean="0"/>
-              <a:t>2026/5/19</a:t>
+              <a:t>2026/7/11</a:t>
             </a:fld>
             <a:endParaRPr lang="zh-CN" altLang="en-US"/>
           </a:p>
@@ -2352,7 +2351,7 @@
           <a:p>
             <a:fld id="{35A37826-251B-4A88-B5F1-14358E59E079}" type="datetimeFigureOut">
               <a:rPr lang="zh-CN" altLang="en-US" smtClean="0"/>
-              <a:t>2026/5/19</a:t>
+              <a:t>2026/7/11</a:t>
             </a:fld>
             <a:endParaRPr lang="zh-CN" altLang="en-US"/>
           </a:p>
@@ -2565,7 +2564,7 @@
           <a:p>
             <a:fld id="{35A37826-251B-4A88-B5F1-14358E59E079}" type="datetimeFigureOut">
               <a:rPr lang="zh-CN" altLang="en-US" smtClean="0"/>
-              <a:t>2026/5/19</a:t>
+              <a:t>2026/7/11</a:t>
             </a:fld>
             <a:endParaRPr lang="zh-CN" altLang="en-US"/>
           </a:p>
@@ -2972,341 +2971,6 @@
       </p:grpSpPr>
       <p:sp>
         <p:nvSpPr>
-          <p:cNvPr id="4" name="矩形 3"/>
-          <p:cNvSpPr/>
-          <p:nvPr/>
-        </p:nvSpPr>
-        <p:spPr>
-          <a:xfrm>
-            <a:off x="579120" y="457201"/>
-            <a:ext cx="3888105" cy="4933949"/>
-          </a:xfrm>
-          <a:prstGeom prst="rect">
-            <a:avLst/>
-          </a:prstGeom>
-          <a:gradFill>
-            <a:gsLst>
-              <a:gs pos="21000">
-                <a:schemeClr val="bg1"/>
-              </a:gs>
-              <a:gs pos="97000">
-                <a:srgbClr val="FFFF00"/>
-              </a:gs>
-            </a:gsLst>
-            <a:lin ang="5400000" scaled="1"/>
-          </a:gradFill>
-          <a:ln w="19050" cap="sq" cmpd="thickThin">
-            <a:solidFill>
-              <a:schemeClr val="accent5">
-                <a:lumMod val="50000"/>
-                <a:alpha val="49000"/>
-              </a:schemeClr>
-            </a:solidFill>
-            <a:miter lim="800000"/>
-          </a:ln>
-          <a:effectLst>
-            <a:outerShdw blurRad="50800" dist="38100" dir="4800000" sx="101000" sy="101000" algn="tl" rotWithShape="0">
-              <a:schemeClr val="accent5">
-                <a:lumMod val="75000"/>
-                <a:alpha val="40000"/>
-              </a:schemeClr>
-            </a:outerShdw>
-          </a:effectLst>
-        </p:spPr>
-        <p:style>
-          <a:lnRef idx="2">
-            <a:schemeClr val="accent1">
-              <a:shade val="50000"/>
-            </a:schemeClr>
-          </a:lnRef>
-          <a:fillRef idx="1">
-            <a:schemeClr val="accent1"/>
-          </a:fillRef>
-          <a:effectRef idx="0">
-            <a:schemeClr val="accent1"/>
-          </a:effectRef>
-          <a:fontRef idx="minor">
-            <a:schemeClr val="lt1"/>
-          </a:fontRef>
-        </p:style>
-        <p:txBody>
-          <a:bodyPr rtlCol="0" anchor="ctr"/>
-          <a:lstStyle/>
-          <a:p>
-            <a:pPr algn="ctr"/>
-            <a:endParaRPr lang="zh-CN" altLang="en-US" dirty="0">
-              <a:solidFill>
-                <a:srgbClr val="C00000"/>
-              </a:solidFill>
-              <a:latin typeface="微软雅黑" panose="020B0503020204020204" pitchFamily="34" charset="-122"/>
-              <a:ea typeface="微软雅黑" panose="020B0503020204020204" pitchFamily="34" charset="-122"/>
-            </a:endParaRPr>
-          </a:p>
-        </p:txBody>
-      </p:sp>
-      <p:sp>
-        <p:nvSpPr>
-          <p:cNvPr id="6" name="矩形 5"/>
-          <p:cNvSpPr/>
-          <p:nvPr/>
-        </p:nvSpPr>
-        <p:spPr>
-          <a:xfrm>
-            <a:off x="622935" y="2522479"/>
-            <a:ext cx="3844290" cy="830997"/>
-          </a:xfrm>
-          <a:prstGeom prst="rect">
-            <a:avLst/>
-          </a:prstGeom>
-        </p:spPr>
-        <p:txBody>
-          <a:bodyPr wrap="square" lIns="36000" rIns="36000">
-            <a:spAutoFit/>
-          </a:bodyPr>
-          <a:lstStyle/>
-          <a:p>
-            <a:pPr algn="ctr"/>
-            <a:r>
-              <a:rPr lang="en-US" altLang="zh-CN" sz="2000" b="1" kern="0" spc="300" dirty="0" smtClean="0">
-                <a:solidFill>
-                  <a:srgbClr val="7030A0"/>
-                </a:solidFill>
-                <a:latin typeface="微软雅黑" panose="020B0503020204020204" pitchFamily="34" charset="-122"/>
-                <a:ea typeface="微软雅黑" panose="020B0503020204020204" pitchFamily="34" charset="-122"/>
-              </a:rPr>
-              <a:t>Empirical Research</a:t>
-            </a:r>
-          </a:p>
-          <a:p>
-            <a:pPr algn="ctr"/>
-            <a:r>
-              <a:rPr lang="en-US" altLang="zh-CN" sz="2000" b="1" kern="0" spc="300" dirty="0" smtClean="0">
-                <a:solidFill>
-                  <a:schemeClr val="bg2">
-                    <a:lumMod val="50000"/>
-                  </a:schemeClr>
-                </a:solidFill>
-                <a:latin typeface="微软雅黑" panose="020B0503020204020204" pitchFamily="34" charset="-122"/>
-                <a:ea typeface="微软雅黑" panose="020B0503020204020204" pitchFamily="34" charset="-122"/>
-              </a:rPr>
-              <a:t>with</a:t>
-            </a:r>
-            <a:r>
-              <a:rPr lang="en-US" altLang="zh-CN" sz="2000" b="1" kern="0" spc="300" dirty="0" smtClean="0">
-                <a:solidFill>
-                  <a:srgbClr val="7030A0"/>
-                </a:solidFill>
-                <a:latin typeface="微软雅黑" panose="020B0503020204020204" pitchFamily="34" charset="-122"/>
-                <a:ea typeface="微软雅黑" panose="020B0503020204020204" pitchFamily="34" charset="-122"/>
-              </a:rPr>
-              <a:t> </a:t>
-            </a:r>
-            <a:r>
-              <a:rPr lang="en-US" altLang="zh-CN" sz="2800" b="1" kern="0" spc="300" dirty="0" smtClean="0">
-                <a:solidFill>
-                  <a:schemeClr val="accent1">
-                    <a:lumMod val="75000"/>
-                  </a:schemeClr>
-                </a:solidFill>
-                <a:latin typeface="微软雅黑" panose="020B0503020204020204" pitchFamily="34" charset="-122"/>
-                <a:ea typeface="微软雅黑" panose="020B0503020204020204" pitchFamily="34" charset="-122"/>
-              </a:rPr>
-              <a:t>AI</a:t>
-            </a:r>
-          </a:p>
-        </p:txBody>
-      </p:sp>
-      <p:sp>
-        <p:nvSpPr>
-          <p:cNvPr id="3" name="文本框 2"/>
-          <p:cNvSpPr txBox="1"/>
-          <p:nvPr/>
-        </p:nvSpPr>
-        <p:spPr>
-          <a:xfrm>
-            <a:off x="579120" y="457201"/>
-            <a:ext cx="3888105" cy="369332"/>
-          </a:xfrm>
-          <a:prstGeom prst="rect">
-            <a:avLst/>
-          </a:prstGeom>
-          <a:solidFill>
-            <a:srgbClr val="00B0F0"/>
-          </a:solidFill>
-        </p:spPr>
-        <p:txBody>
-          <a:bodyPr wrap="square" rtlCol="0">
-            <a:spAutoFit/>
-          </a:bodyPr>
-          <a:lstStyle/>
-          <a:p>
-            <a:endParaRPr lang="zh-CN" altLang="en-US" dirty="0"/>
-          </a:p>
-        </p:txBody>
-      </p:sp>
-      <p:sp>
-        <p:nvSpPr>
-          <p:cNvPr id="8" name="文本框 7"/>
-          <p:cNvSpPr txBox="1"/>
-          <p:nvPr/>
-        </p:nvSpPr>
-        <p:spPr>
-          <a:xfrm>
-            <a:off x="575070" y="5021818"/>
-            <a:ext cx="3892155" cy="369332"/>
-          </a:xfrm>
-          <a:prstGeom prst="rect">
-            <a:avLst/>
-          </a:prstGeom>
-          <a:solidFill>
-            <a:srgbClr val="00B0F0"/>
-          </a:solidFill>
-        </p:spPr>
-        <p:txBody>
-          <a:bodyPr wrap="square" rtlCol="0">
-            <a:spAutoFit/>
-          </a:bodyPr>
-          <a:lstStyle/>
-          <a:p>
-            <a:endParaRPr lang="zh-CN" altLang="en-US" dirty="0"/>
-          </a:p>
-        </p:txBody>
-      </p:sp>
-      <p:sp>
-        <p:nvSpPr>
-          <p:cNvPr id="5" name="矩形 4"/>
-          <p:cNvSpPr/>
-          <p:nvPr/>
-        </p:nvSpPr>
-        <p:spPr>
-          <a:xfrm>
-            <a:off x="1884311" y="5050821"/>
-            <a:ext cx="1308051" cy="307777"/>
-          </a:xfrm>
-          <a:prstGeom prst="rect">
-            <a:avLst/>
-          </a:prstGeom>
-        </p:spPr>
-        <p:txBody>
-          <a:bodyPr wrap="none">
-            <a:spAutoFit/>
-          </a:bodyPr>
-          <a:lstStyle/>
-          <a:p>
-            <a:pPr algn="ctr"/>
-            <a:r>
-              <a:rPr lang="en-US" altLang="zh-CN" sz="1400" dirty="0" smtClean="0">
-                <a:solidFill>
-                  <a:schemeClr val="bg1"/>
-                </a:solidFill>
-                <a:latin typeface="微软雅黑 Light" panose="020B0502040204020203" pitchFamily="34" charset="-122"/>
-                <a:ea typeface="微软雅黑 Light" panose="020B0502040204020203" pitchFamily="34" charset="-122"/>
-              </a:rPr>
-              <a:t>www.lianxh.cn</a:t>
-            </a:r>
-            <a:endParaRPr lang="zh-CN" altLang="en-US" sz="1400" dirty="0">
-              <a:solidFill>
-                <a:schemeClr val="bg1"/>
-              </a:solidFill>
-              <a:latin typeface="微软雅黑 Light" panose="020B0502040204020203" pitchFamily="34" charset="-122"/>
-              <a:ea typeface="微软雅黑 Light" panose="020B0502040204020203" pitchFamily="34" charset="-122"/>
-            </a:endParaRPr>
-          </a:p>
-        </p:txBody>
-      </p:sp>
-      <p:pic>
-        <p:nvPicPr>
-          <p:cNvPr id="2" name="图片 1"/>
-          <p:cNvPicPr>
-            <a:picLocks noChangeAspect="1"/>
-          </p:cNvPicPr>
-          <p:nvPr/>
-        </p:nvPicPr>
-        <p:blipFill>
-          <a:blip r:embed="rId2" cstate="print">
-            <a:extLst>
-              <a:ext uri="{28A0092B-C50C-407E-A947-70E740481C1C}">
-                <a14:useLocalDpi xmlns:a14="http://schemas.microsoft.com/office/drawing/2010/main" val="0"/>
-              </a:ext>
-            </a:extLst>
-          </a:blip>
-          <a:stretch>
-            <a:fillRect/>
-          </a:stretch>
-        </p:blipFill>
-        <p:spPr>
-          <a:xfrm>
-            <a:off x="1272745" y="745113"/>
-            <a:ext cx="2179063" cy="1452708"/>
-          </a:xfrm>
-          <a:prstGeom prst="rect">
-            <a:avLst/>
-          </a:prstGeom>
-        </p:spPr>
-      </p:pic>
-      <p:pic>
-        <p:nvPicPr>
-          <p:cNvPr id="7" name="图片 6"/>
-          <p:cNvPicPr>
-            <a:picLocks noChangeAspect="1"/>
-          </p:cNvPicPr>
-          <p:nvPr/>
-        </p:nvPicPr>
-        <p:blipFill>
-          <a:blip r:embed="rId3"/>
-          <a:stretch>
-            <a:fillRect/>
-          </a:stretch>
-        </p:blipFill>
-        <p:spPr>
-          <a:xfrm>
-            <a:off x="6886245" y="457201"/>
-            <a:ext cx="4054191" cy="5108891"/>
-          </a:xfrm>
-          <a:prstGeom prst="rect">
-            <a:avLst/>
-          </a:prstGeom>
-        </p:spPr>
-      </p:pic>
-    </p:spTree>
-    <p:extLst>
-      <p:ext uri="{BB962C8B-B14F-4D97-AF65-F5344CB8AC3E}">
-        <p14:creationId xmlns:p14="http://schemas.microsoft.com/office/powerpoint/2010/main" val="3870234200"/>
-      </p:ext>
-    </p:extLst>
-  </p:cSld>
-  <p:clrMapOvr>
-    <a:masterClrMapping/>
-  </p:clrMapOvr>
-  <p:timing>
-    <p:tnLst>
-      <p:par>
-        <p:cTn id="1" dur="indefinite" restart="never" nodeType="tmRoot"/>
-      </p:par>
-    </p:tnLst>
-  </p:timing>
-</p:sld>
-</file>
-
-<file path=ppt/slides/slide2.xml><?xml version="1.0" encoding="utf-8"?>
-<p:sld xmlns:a="http://schemas.openxmlformats.org/drawingml/2006/main" xmlns:r="http://schemas.openxmlformats.org/officeDocument/2006/relationships" xmlns:p="http://schemas.openxmlformats.org/presentationml/2006/main">
-  <p:cSld>
-    <p:spTree>
-      <p:nvGrpSpPr>
-        <p:cNvPr id="1" name=""/>
-        <p:cNvGrpSpPr/>
-        <p:nvPr/>
-      </p:nvGrpSpPr>
-      <p:grpSpPr>
-        <a:xfrm>
-          <a:off x="0" y="0"/>
-          <a:ext cx="0" cy="0"/>
-          <a:chOff x="0" y="0"/>
-          <a:chExt cx="0" cy="0"/>
-        </a:xfrm>
-      </p:grpSpPr>
-      <p:sp>
-        <p:nvSpPr>
           <p:cNvPr id="3" name="文本框 2"/>
           <p:cNvSpPr txBox="1"/>
           <p:nvPr/>
@@ -3404,7 +3068,7 @@
             <a:avLst/>
           </a:prstGeom>
           <a:solidFill>
-            <a:srgbClr val="B028C2"/>
+            <a:srgbClr val="0C667E"/>
           </a:solidFill>
           <a:ln>
             <a:noFill/>
@@ -3451,7 +3115,7 @@
       </p:sp>
       <p:pic>
         <p:nvPicPr>
-          <p:cNvPr id="5" name="图片 4"/>
+          <p:cNvPr id="2" name="图片 1"/>
           <p:cNvPicPr>
             <a:picLocks noChangeAspect="1"/>
           </p:cNvPicPr>
@@ -3465,7 +3129,7 @@
         </p:blipFill>
         <p:spPr>
           <a:xfrm>
-            <a:off x="5032156" y="2252370"/>
+            <a:off x="4937421" y="1726296"/>
             <a:ext cx="2127688" cy="2353260"/>
           </a:xfrm>
           <a:prstGeom prst="rect">
